--- a/deliverables/smb_bundles/smb_bundles_2_prioritize.pptx
+++ b/deliverables/smb_bundles/smb_bundles_2_prioritize.pptx
@@ -1610,7 +1610,7 @@
           <a:lstStyle/>
           <a:p>
             <a:r>
-              <a:rPr sz="7000" b="1">
+              <a:rPr sz="7000" b="1" dirty="0">
                 <a:solidFill>
                   <a:srgbClr val="37AFFF"/>
                 </a:solidFill>
@@ -1644,7 +1644,7 @@
           <a:lstStyle/>
           <a:p>
             <a:r>
-              <a:rPr sz="2200" b="1">
+              <a:rPr sz="2200" dirty="0">
                 <a:solidFill>
                   <a:srgbClr val="A7A7A7"/>
                 </a:solidFill>
@@ -1741,10 +1741,17 @@
           </a:prstGeom>
           <a:ln w="9525">
             <a:solidFill>
-              <a:srgbClr val="242424"/>
+              <a:srgbClr val="3A3A3A"/>
             </a:solidFill>
           </a:ln>
         </p:spPr>
+        <p:txBody>
+          <a:bodyPr/>
+          <a:lstStyle/>
+          <a:p>
+            <a:endParaRPr lang="en-US"/>
+          </a:p>
+        </p:txBody>
       </p:sp>
       <p:sp>
         <p:nvSpPr>
@@ -1754,8 +1761,8 @@
         </p:nvSpPr>
         <p:spPr>
           <a:xfrm>
-            <a:off x="10744200" y="6286500"/>
-            <a:ext cx="990600" cy="228600"/>
+            <a:off x="11146536" y="6291072"/>
+            <a:ext cx="590550" cy="228600"/>
           </a:xfrm>
           <a:noFill/>
           <a:ln>
@@ -1766,10 +1773,11 @@
           <a:bodyPr lIns="0" tIns="0" rIns="0" bIns="0" anchor="t"/>
           <a:lstStyle/>
           <a:p>
+            <a:pPr algn="r"/>
             <a:r>
-              <a:rPr sz="950" b="1">
+              <a:rPr sz="900" b="0" lang="en-US">
                 <a:solidFill>
-                  <a:srgbClr val="A7A7A7"/>
+                  <a:srgbClr val="A5A5A5"/>
                 </a:solidFill>
                 <a:latin typeface="Arial"/>
                 <a:ea typeface="Arial"/>
@@ -1869,9 +1877,9 @@
               </a:defRPr>
             </a:pPr>
             <a:r>
-              <a:rPr sz="3600" b="0">
+              <a:rPr sz="3600" b="1" lang="en-US">
                 <a:solidFill>
-                  <a:srgbClr val="4FB3FF"/>
+                  <a:srgbClr val="37AFFF"/>
                 </a:solidFill>
                 <a:latin typeface="Arial"/>
                 <a:ea typeface="Arial"/>
@@ -1923,7 +1931,7 @@
           <a:lstStyle/>
           <a:p>
             <a:r>
-              <a:rPr sz="3600" b="0">
+              <a:rPr sz="3600" b="1" lang="en-US">
                 <a:solidFill>
                   <a:srgbClr val="F3F4F6"/>
                 </a:solidFill>
@@ -1950,7 +1958,7 @@
         </p:nvSpPr>
         <p:spPr>
           <a:xfrm>
-            <a:off x="457200" y="1162050"/>
+            <a:off x="457200" y="1160000"/>
             <a:ext cx="11277600" cy="0"/>
           </a:xfrm>
           <a:prstGeom prst="rect">
@@ -1959,7 +1967,7 @@
           <a:solidFill>
             <a:srgbClr val="3A3A3A"/>
           </a:solidFill>
-          <a:ln w="0">
+          <a:ln w="9525">
             <a:solidFill>
               <a:srgbClr val="3A3A3A"/>
             </a:solidFill>
@@ -1999,7 +2007,7 @@
           <a:solidFill>
             <a:srgbClr val="3A3A3A"/>
           </a:solidFill>
-          <a:ln w="0">
+          <a:ln w="9525">
             <a:solidFill>
               <a:srgbClr val="3A3A3A"/>
             </a:solidFill>
@@ -2082,7 +2090,7 @@
         </p:nvSpPr>
         <p:spPr>
           <a:xfrm>
-            <a:off x="11144250" y="6286500"/>
+            <a:off x="11146536" y="6291072"/>
             <a:ext cx="590550" cy="228600"/>
           </a:xfrm>
           <a:prstGeom prst="rect">
@@ -2117,7 +2125,7 @@
               </a:defRPr>
             </a:pPr>
             <a:r>
-              <a:rPr sz="900" b="0">
+              <a:rPr sz="900" b="0" lang="en-US">
                 <a:solidFill>
                   <a:srgbClr val="A5A5A5"/>
                 </a:solidFill>
@@ -2125,7 +2133,7 @@
                 <a:ea typeface="Arial"/>
                 <a:cs typeface="Arial"/>
               </a:rPr>
-              <a:t>15 / 21</a:t>
+              <a:t>10 / 12</a:t>
             </a:r>
           </a:p>
         </p:txBody>
@@ -3746,9 +3754,9 @@
               </a:defRPr>
             </a:pPr>
             <a:r>
-              <a:rPr sz="3600" b="0">
+              <a:rPr sz="3600" b="1" lang="en-US">
                 <a:solidFill>
-                  <a:srgbClr val="4FB3FF"/>
+                  <a:srgbClr val="37AFFF"/>
                 </a:solidFill>
                 <a:latin typeface="Arial"/>
                 <a:ea typeface="Arial"/>
@@ -3800,7 +3808,7 @@
           <a:lstStyle/>
           <a:p>
             <a:r>
-              <a:rPr sz="3600" b="0">
+              <a:rPr sz="3600" b="1" lang="en-US">
                 <a:solidFill>
                   <a:srgbClr val="F3F4F6"/>
                 </a:solidFill>
@@ -3827,7 +3835,7 @@
         </p:nvSpPr>
         <p:spPr>
           <a:xfrm>
-            <a:off x="457200" y="1162050"/>
+            <a:off x="457200" y="1160000"/>
             <a:ext cx="11277600" cy="0"/>
           </a:xfrm>
           <a:prstGeom prst="rect">
@@ -3836,7 +3844,7 @@
           <a:solidFill>
             <a:srgbClr val="3A3A3A"/>
           </a:solidFill>
-          <a:ln w="0">
+          <a:ln w="9525">
             <a:solidFill>
               <a:srgbClr val="3A3A3A"/>
             </a:solidFill>
@@ -3876,7 +3884,7 @@
           <a:solidFill>
             <a:srgbClr val="3A3A3A"/>
           </a:solidFill>
-          <a:ln w="0">
+          <a:ln w="9525">
             <a:solidFill>
               <a:srgbClr val="3A3A3A"/>
             </a:solidFill>
@@ -3959,7 +3967,7 @@
         </p:nvSpPr>
         <p:spPr>
           <a:xfrm>
-            <a:off x="11144250" y="6286500"/>
+            <a:off x="11146536" y="6291072"/>
             <a:ext cx="590550" cy="228600"/>
           </a:xfrm>
           <a:prstGeom prst="rect">
@@ -3994,7 +4002,7 @@
               </a:defRPr>
             </a:pPr>
             <a:r>
-              <a:rPr sz="900" b="0">
+              <a:rPr sz="900" b="0" lang="en-US">
                 <a:solidFill>
                   <a:srgbClr val="A5A5A5"/>
                 </a:solidFill>
@@ -4002,7 +4010,7 @@
                 <a:ea typeface="Arial"/>
                 <a:cs typeface="Arial"/>
               </a:rPr>
-              <a:t>16 / 21</a:t>
+              <a:t>11 / 12</a:t>
             </a:r>
           </a:p>
         </p:txBody>
@@ -4172,9 +4180,9 @@
               </a:defRPr>
             </a:pPr>
             <a:r>
-              <a:rPr sz="3600" b="0">
+              <a:rPr sz="3600" b="1" lang="en-US">
                 <a:solidFill>
-                  <a:srgbClr val="4FB3FF"/>
+                  <a:srgbClr val="37AFFF"/>
                 </a:solidFill>
                 <a:latin typeface="Arial"/>
                 <a:ea typeface="Arial"/>
@@ -4226,7 +4234,7 @@
           <a:lstStyle/>
           <a:p>
             <a:r>
-              <a:rPr sz="3600" b="0">
+              <a:rPr sz="3600" b="1" lang="en-US">
                 <a:solidFill>
                   <a:srgbClr val="F3F4F6"/>
                 </a:solidFill>
@@ -4253,7 +4261,7 @@
         </p:nvSpPr>
         <p:spPr>
           <a:xfrm>
-            <a:off x="457200" y="1162050"/>
+            <a:off x="457200" y="1160000"/>
             <a:ext cx="11277600" cy="0"/>
           </a:xfrm>
           <a:prstGeom prst="rect">
@@ -4262,7 +4270,7 @@
           <a:solidFill>
             <a:srgbClr val="3A3A3A"/>
           </a:solidFill>
-          <a:ln w="0">
+          <a:ln w="9525">
             <a:solidFill>
               <a:srgbClr val="3A3A3A"/>
             </a:solidFill>
@@ -4302,7 +4310,7 @@
           <a:solidFill>
             <a:srgbClr val="3A3A3A"/>
           </a:solidFill>
-          <a:ln w="0">
+          <a:ln w="9525">
             <a:solidFill>
               <a:srgbClr val="3A3A3A"/>
             </a:solidFill>
@@ -4385,7 +4393,7 @@
         </p:nvSpPr>
         <p:spPr>
           <a:xfrm>
-            <a:off x="11144250" y="6286500"/>
+            <a:off x="11146536" y="6291072"/>
             <a:ext cx="590550" cy="228600"/>
           </a:xfrm>
           <a:prstGeom prst="rect">
@@ -4420,7 +4428,7 @@
               </a:defRPr>
             </a:pPr>
             <a:r>
-              <a:rPr sz="900" b="0">
+              <a:rPr sz="900" b="0" lang="en-US">
                 <a:solidFill>
                   <a:srgbClr val="A5A5A5"/>
                 </a:solidFill>
@@ -4428,7 +4436,7 @@
                 <a:ea typeface="Arial"/>
                 <a:cs typeface="Arial"/>
               </a:rPr>
-              <a:t>17 / 21</a:t>
+              <a:t>12 / 12</a:t>
             </a:r>
           </a:p>
         </p:txBody>
@@ -4894,9 +4902,9 @@
               </a:defRPr>
             </a:pPr>
             <a:r>
-              <a:rPr sz="3600" b="0">
+              <a:rPr sz="3600" b="1" lang="en-US">
                 <a:solidFill>
-                  <a:srgbClr val="4FB3FF"/>
+                  <a:srgbClr val="37AFFF"/>
                 </a:solidFill>
                 <a:latin typeface="Arial"/>
                 <a:ea typeface="Arial"/>
@@ -4948,7 +4956,7 @@
           <a:lstStyle/>
           <a:p>
             <a:r>
-              <a:rPr sz="3600" b="0">
+              <a:rPr sz="3600" b="1" lang="en-US">
                 <a:solidFill>
                   <a:srgbClr val="F3F4F6"/>
                 </a:solidFill>
@@ -4975,7 +4983,7 @@
         </p:nvSpPr>
         <p:spPr>
           <a:xfrm>
-            <a:off x="457200" y="1162050"/>
+            <a:off x="457200" y="1160000"/>
             <a:ext cx="11277600" cy="0"/>
           </a:xfrm>
           <a:prstGeom prst="rect">
@@ -4984,7 +4992,7 @@
           <a:solidFill>
             <a:srgbClr val="3A3A3A"/>
           </a:solidFill>
-          <a:ln w="0">
+          <a:ln w="9525">
             <a:solidFill>
               <a:srgbClr val="3A3A3A"/>
             </a:solidFill>
@@ -5024,7 +5032,7 @@
           <a:solidFill>
             <a:srgbClr val="3A3A3A"/>
           </a:solidFill>
-          <a:ln w="0">
+          <a:ln w="9525">
             <a:solidFill>
               <a:srgbClr val="3A3A3A"/>
             </a:solidFill>
@@ -5107,7 +5115,7 @@
         </p:nvSpPr>
         <p:spPr>
           <a:xfrm>
-            <a:off x="11144250" y="6286500"/>
+            <a:off x="11146536" y="6291072"/>
             <a:ext cx="590550" cy="228600"/>
           </a:xfrm>
           <a:prstGeom prst="rect">
@@ -5142,7 +5150,7 @@
               </a:defRPr>
             </a:pPr>
             <a:r>
-              <a:rPr sz="900" b="0">
+              <a:rPr sz="900" b="0" lang="en-US">
                 <a:solidFill>
                   <a:srgbClr val="A5A5A5"/>
                 </a:solidFill>
@@ -5150,7 +5158,7 @@
                 <a:ea typeface="Arial"/>
                 <a:cs typeface="Arial"/>
               </a:rPr>
-              <a:t>02 / 21</a:t>
+              <a:t>02 / 12</a:t>
             </a:r>
           </a:p>
         </p:txBody>
@@ -5294,9 +5302,9 @@
               </a:defRPr>
             </a:pPr>
             <a:r>
-              <a:rPr sz="3600" b="0">
+              <a:rPr sz="3600" b="1" lang="en-US">
                 <a:solidFill>
-                  <a:srgbClr val="4FB3FF"/>
+                  <a:srgbClr val="37AFFF"/>
                 </a:solidFill>
                 <a:latin typeface="Arial"/>
                 <a:ea typeface="Arial"/>
@@ -5348,7 +5356,7 @@
           <a:lstStyle/>
           <a:p>
             <a:r>
-              <a:rPr sz="3600" b="0">
+              <a:rPr sz="3600" b="1" lang="en-US">
                 <a:solidFill>
                   <a:srgbClr val="F3F4F6"/>
                 </a:solidFill>
@@ -5375,7 +5383,7 @@
         </p:nvSpPr>
         <p:spPr>
           <a:xfrm>
-            <a:off x="457200" y="1162050"/>
+            <a:off x="457200" y="1160000"/>
             <a:ext cx="11277600" cy="0"/>
           </a:xfrm>
           <a:prstGeom prst="rect">
@@ -5384,7 +5392,7 @@
           <a:solidFill>
             <a:srgbClr val="3A3A3A"/>
           </a:solidFill>
-          <a:ln w="0">
+          <a:ln w="9525">
             <a:solidFill>
               <a:srgbClr val="3A3A3A"/>
             </a:solidFill>
@@ -5424,7 +5432,7 @@
           <a:solidFill>
             <a:srgbClr val="3A3A3A"/>
           </a:solidFill>
-          <a:ln w="0">
+          <a:ln w="9525">
             <a:solidFill>
               <a:srgbClr val="3A3A3A"/>
             </a:solidFill>
@@ -5507,7 +5515,7 @@
         </p:nvSpPr>
         <p:spPr>
           <a:xfrm>
-            <a:off x="11144250" y="6286500"/>
+            <a:off x="11146536" y="6291072"/>
             <a:ext cx="590550" cy="228600"/>
           </a:xfrm>
           <a:prstGeom prst="rect">
@@ -5542,7 +5550,7 @@
               </a:defRPr>
             </a:pPr>
             <a:r>
-              <a:rPr sz="900" b="0">
+              <a:rPr sz="900" b="0" lang="en-US">
                 <a:solidFill>
                   <a:srgbClr val="A5A5A5"/>
                 </a:solidFill>
@@ -5550,7 +5558,7 @@
                 <a:ea typeface="Arial"/>
                 <a:cs typeface="Arial"/>
               </a:rPr>
-              <a:t>05 / 21</a:t>
+              <a:t>03 / 12</a:t>
             </a:r>
           </a:p>
         </p:txBody>
@@ -6751,9 +6759,9 @@
               </a:defRPr>
             </a:pPr>
             <a:r>
-              <a:rPr sz="3600" b="0">
+              <a:rPr sz="3600" b="1" lang="en-US">
                 <a:solidFill>
-                  <a:srgbClr val="4FB3FF"/>
+                  <a:srgbClr val="37AFFF"/>
                 </a:solidFill>
                 <a:latin typeface="Arial"/>
                 <a:ea typeface="Arial"/>
@@ -6805,7 +6813,7 @@
           <a:lstStyle/>
           <a:p>
             <a:r>
-              <a:rPr sz="3600" b="0">
+              <a:rPr sz="3600" b="1" lang="en-US">
                 <a:solidFill>
                   <a:srgbClr val="F3F4F6"/>
                 </a:solidFill>
@@ -6832,7 +6840,7 @@
         </p:nvSpPr>
         <p:spPr>
           <a:xfrm>
-            <a:off x="457200" y="1162050"/>
+            <a:off x="457200" y="1160000"/>
             <a:ext cx="11277600" cy="0"/>
           </a:xfrm>
           <a:prstGeom prst="rect">
@@ -6841,7 +6849,7 @@
           <a:solidFill>
             <a:srgbClr val="3A3A3A"/>
           </a:solidFill>
-          <a:ln w="0">
+          <a:ln w="9525">
             <a:solidFill>
               <a:srgbClr val="3A3A3A"/>
             </a:solidFill>
@@ -6881,7 +6889,7 @@
           <a:solidFill>
             <a:srgbClr val="3A3A3A"/>
           </a:solidFill>
-          <a:ln w="0">
+          <a:ln w="9525">
             <a:solidFill>
               <a:srgbClr val="3A3A3A"/>
             </a:solidFill>
@@ -6964,7 +6972,7 @@
         </p:nvSpPr>
         <p:spPr>
           <a:xfrm>
-            <a:off x="11144250" y="6286500"/>
+            <a:off x="11146536" y="6291072"/>
             <a:ext cx="590550" cy="228600"/>
           </a:xfrm>
           <a:prstGeom prst="rect">
@@ -6999,7 +7007,7 @@
               </a:defRPr>
             </a:pPr>
             <a:r>
-              <a:rPr sz="900" b="0">
+              <a:rPr sz="900" b="0" lang="en-US">
                 <a:solidFill>
                   <a:srgbClr val="A5A5A5"/>
                 </a:solidFill>
@@ -7007,7 +7015,7 @@
                 <a:ea typeface="Arial"/>
                 <a:cs typeface="Arial"/>
               </a:rPr>
-              <a:t>06 / 21</a:t>
+              <a:t>04 / 12</a:t>
             </a:r>
           </a:p>
         </p:txBody>
@@ -7304,9 +7312,9 @@
               </a:defRPr>
             </a:pPr>
             <a:r>
-              <a:rPr sz="3600" b="0">
+              <a:rPr sz="3600" b="1" lang="en-US">
                 <a:solidFill>
-                  <a:srgbClr val="4FB3FF"/>
+                  <a:srgbClr val="37AFFF"/>
                 </a:solidFill>
                 <a:latin typeface="Arial"/>
                 <a:ea typeface="Arial"/>
@@ -7358,7 +7366,7 @@
           <a:lstStyle/>
           <a:p>
             <a:r>
-              <a:rPr sz="3600" b="0">
+              <a:rPr sz="3600" b="1" lang="en-US">
                 <a:solidFill>
                   <a:srgbClr val="F3F4F6"/>
                 </a:solidFill>
@@ -7385,7 +7393,7 @@
         </p:nvSpPr>
         <p:spPr>
           <a:xfrm>
-            <a:off x="457200" y="1162050"/>
+            <a:off x="457200" y="1160000"/>
             <a:ext cx="11277600" cy="0"/>
           </a:xfrm>
           <a:prstGeom prst="rect">
@@ -7394,7 +7402,7 @@
           <a:solidFill>
             <a:srgbClr val="3A3A3A"/>
           </a:solidFill>
-          <a:ln w="0">
+          <a:ln w="9525">
             <a:solidFill>
               <a:srgbClr val="3A3A3A"/>
             </a:solidFill>
@@ -7434,7 +7442,7 @@
           <a:solidFill>
             <a:srgbClr val="3A3A3A"/>
           </a:solidFill>
-          <a:ln w="0">
+          <a:ln w="9525">
             <a:solidFill>
               <a:srgbClr val="3A3A3A"/>
             </a:solidFill>
@@ -7517,7 +7525,7 @@
         </p:nvSpPr>
         <p:spPr>
           <a:xfrm>
-            <a:off x="11144250" y="6286500"/>
+            <a:off x="11146536" y="6291072"/>
             <a:ext cx="590550" cy="228600"/>
           </a:xfrm>
           <a:prstGeom prst="rect">
@@ -7552,7 +7560,7 @@
               </a:defRPr>
             </a:pPr>
             <a:r>
-              <a:rPr sz="900" b="0">
+              <a:rPr sz="900" b="0" lang="en-US">
                 <a:solidFill>
                   <a:srgbClr val="A5A5A5"/>
                 </a:solidFill>
@@ -7560,7 +7568,7 @@
                 <a:ea typeface="Arial"/>
                 <a:cs typeface="Arial"/>
               </a:rPr>
-              <a:t>07 / 21</a:t>
+              <a:t>05 / 12</a:t>
             </a:r>
           </a:p>
         </p:txBody>
@@ -7867,9 +7875,9 @@
               </a:defRPr>
             </a:pPr>
             <a:r>
-              <a:rPr sz="3600" b="0">
+              <a:rPr sz="3600" b="1" lang="en-US">
                 <a:solidFill>
-                  <a:srgbClr val="4FB3FF"/>
+                  <a:srgbClr val="37AFFF"/>
                 </a:solidFill>
                 <a:latin typeface="Arial"/>
                 <a:ea typeface="Arial"/>
@@ -7921,7 +7929,7 @@
           <a:lstStyle/>
           <a:p>
             <a:r>
-              <a:rPr sz="3600" b="0">
+              <a:rPr sz="3600" b="1" lang="en-US">
                 <a:solidFill>
                   <a:srgbClr val="F3F4F6"/>
                 </a:solidFill>
@@ -7948,7 +7956,7 @@
         </p:nvSpPr>
         <p:spPr>
           <a:xfrm>
-            <a:off x="457200" y="1162050"/>
+            <a:off x="457200" y="1160000"/>
             <a:ext cx="11277600" cy="0"/>
           </a:xfrm>
           <a:prstGeom prst="rect">
@@ -7957,7 +7965,7 @@
           <a:solidFill>
             <a:srgbClr val="3A3A3A"/>
           </a:solidFill>
-          <a:ln w="0">
+          <a:ln w="9525">
             <a:solidFill>
               <a:srgbClr val="3A3A3A"/>
             </a:solidFill>
@@ -7997,7 +8005,7 @@
           <a:solidFill>
             <a:srgbClr val="3A3A3A"/>
           </a:solidFill>
-          <a:ln w="0">
+          <a:ln w="9525">
             <a:solidFill>
               <a:srgbClr val="3A3A3A"/>
             </a:solidFill>
@@ -8080,7 +8088,7 @@
         </p:nvSpPr>
         <p:spPr>
           <a:xfrm>
-            <a:off x="11144250" y="6286500"/>
+            <a:off x="11146536" y="6291072"/>
             <a:ext cx="590550" cy="228600"/>
           </a:xfrm>
           <a:prstGeom prst="rect">
@@ -8115,7 +8123,7 @@
               </a:defRPr>
             </a:pPr>
             <a:r>
-              <a:rPr sz="900" b="0">
+              <a:rPr sz="900" b="0" lang="en-US">
                 <a:solidFill>
                   <a:srgbClr val="A5A5A5"/>
                 </a:solidFill>
@@ -8123,7 +8131,7 @@
                 <a:ea typeface="Arial"/>
                 <a:cs typeface="Arial"/>
               </a:rPr>
-              <a:t>08 / 21</a:t>
+              <a:t>06 / 12</a:t>
             </a:r>
           </a:p>
         </p:txBody>
@@ -9504,9 +9512,9 @@
               </a:defRPr>
             </a:pPr>
             <a:r>
-              <a:rPr sz="3600" b="0">
+              <a:rPr sz="3600" b="1" lang="en-US">
                 <a:solidFill>
-                  <a:srgbClr val="4FB3FF"/>
+                  <a:srgbClr val="37AFFF"/>
                 </a:solidFill>
                 <a:latin typeface="Arial"/>
                 <a:ea typeface="Arial"/>
@@ -9558,7 +9566,7 @@
           <a:lstStyle/>
           <a:p>
             <a:r>
-              <a:rPr sz="3600" dirty="0">
+              <a:rPr sz="3600" dirty="0" lang="en-US" b="1">
                 <a:solidFill>
                   <a:srgbClr val="F3F4F6"/>
                 </a:solidFill>
@@ -9569,7 +9577,7 @@
               <a:t>2.1 Outreach Readiness / </a:t>
             </a:r>
             <a:r>
-              <a:rPr lang="en-US" sz="3600" dirty="0">
+              <a:rPr lang="en-US" sz="3600" dirty="0" b="1">
                 <a:solidFill>
                   <a:srgbClr val="F3F4F6"/>
                 </a:solidFill>
@@ -9580,7 +9588,7 @@
               <a:t>Seller</a:t>
             </a:r>
             <a:r>
-              <a:rPr sz="3600" dirty="0">
+              <a:rPr sz="3600" dirty="0" lang="en-US" b="1">
                 <a:solidFill>
                   <a:srgbClr val="F3F4F6"/>
                 </a:solidFill>
@@ -9609,7 +9617,7 @@
         </p:nvSpPr>
         <p:spPr>
           <a:xfrm>
-            <a:off x="457200" y="1162050"/>
+            <a:off x="457200" y="1160000"/>
             <a:ext cx="11277600" cy="0"/>
           </a:xfrm>
           <a:prstGeom prst="rect">
@@ -9618,7 +9626,7 @@
           <a:solidFill>
             <a:srgbClr val="3A3A3A"/>
           </a:solidFill>
-          <a:ln w="0">
+          <a:ln w="9525">
             <a:solidFill>
               <a:srgbClr val="3A3A3A"/>
             </a:solidFill>
@@ -9658,7 +9666,7 @@
           <a:solidFill>
             <a:srgbClr val="3A3A3A"/>
           </a:solidFill>
-          <a:ln w="0">
+          <a:ln w="9525">
             <a:solidFill>
               <a:srgbClr val="3A3A3A"/>
             </a:solidFill>
@@ -9741,7 +9749,7 @@
         </p:nvSpPr>
         <p:spPr>
           <a:xfrm>
-            <a:off x="11144250" y="6286500"/>
+            <a:off x="11146536" y="6291072"/>
             <a:ext cx="590550" cy="228600"/>
           </a:xfrm>
           <a:prstGeom prst="rect">
@@ -9776,7 +9784,7 @@
               </a:defRPr>
             </a:pPr>
             <a:r>
-              <a:rPr sz="900" b="0">
+              <a:rPr sz="900" b="0" lang="en-US">
                 <a:solidFill>
                   <a:srgbClr val="A5A5A5"/>
                 </a:solidFill>
@@ -9784,7 +9792,7 @@
                 <a:ea typeface="Arial"/>
                 <a:cs typeface="Arial"/>
               </a:rPr>
-              <a:t>10 / 21</a:t>
+              <a:t>07 / 12</a:t>
             </a:r>
           </a:p>
         </p:txBody>
@@ -10019,9 +10027,9 @@
               </a:defRPr>
             </a:pPr>
             <a:r>
-              <a:rPr sz="3600" b="0">
+              <a:rPr sz="3600" b="1" lang="en-US">
                 <a:solidFill>
-                  <a:srgbClr val="4FB3FF"/>
+                  <a:srgbClr val="37AFFF"/>
                 </a:solidFill>
                 <a:latin typeface="Arial"/>
                 <a:ea typeface="Arial"/>
@@ -10073,7 +10081,7 @@
           <a:lstStyle/>
           <a:p>
             <a:r>
-              <a:rPr sz="3600">
+              <a:rPr sz="3600" lang="en-US" b="1">
                 <a:solidFill>
                   <a:srgbClr val="F3F4F6"/>
                 </a:solidFill>
@@ -10102,7 +10110,7 @@
         </p:nvSpPr>
         <p:spPr>
           <a:xfrm>
-            <a:off x="457200" y="1162050"/>
+            <a:off x="457200" y="1160000"/>
             <a:ext cx="11277600" cy="0"/>
           </a:xfrm>
           <a:prstGeom prst="rect">
@@ -10111,7 +10119,7 @@
           <a:solidFill>
             <a:srgbClr val="3A3A3A"/>
           </a:solidFill>
-          <a:ln w="0">
+          <a:ln w="9525">
             <a:solidFill>
               <a:srgbClr val="3A3A3A"/>
             </a:solidFill>
@@ -10151,7 +10159,7 @@
           <a:solidFill>
             <a:srgbClr val="3A3A3A"/>
           </a:solidFill>
-          <a:ln w="0">
+          <a:ln w="9525">
             <a:solidFill>
               <a:srgbClr val="3A3A3A"/>
             </a:solidFill>
@@ -10234,7 +10242,7 @@
         </p:nvSpPr>
         <p:spPr>
           <a:xfrm>
-            <a:off x="11144250" y="6286500"/>
+            <a:off x="11146536" y="6291072"/>
             <a:ext cx="590550" cy="228600"/>
           </a:xfrm>
           <a:prstGeom prst="rect">
@@ -10269,7 +10277,7 @@
               </a:defRPr>
             </a:pPr>
             <a:r>
-              <a:rPr sz="900" b="0">
+              <a:rPr sz="900" b="0" lang="en-US">
                 <a:solidFill>
                   <a:srgbClr val="A5A5A5"/>
                 </a:solidFill>
@@ -10277,7 +10285,7 @@
                 <a:ea typeface="Arial"/>
                 <a:cs typeface="Arial"/>
               </a:rPr>
-              <a:t>12 / 21</a:t>
+              <a:t>08 / 12</a:t>
             </a:r>
           </a:p>
         </p:txBody>
@@ -10336,7 +10344,7 @@
               <a:tr h="552450">
                 <a:tc>
                   <a:txBody>
-                    <a:bodyPr wrap="square" lIns="76200" rIns="76200" tIns="38100" bIns="38100"/>
+                    <a:bodyPr/>
                     <a:lstStyle/>
                     <a:p>
                       <a:pPr algn="l">
@@ -10383,7 +10391,7 @@
                 </a:tc>
                 <a:tc>
                   <a:txBody>
-                    <a:bodyPr wrap="square" lIns="76200" rIns="76200" tIns="38100" bIns="38100"/>
+                    <a:bodyPr/>
                     <a:lstStyle/>
                     <a:p>
                       <a:pPr algn="l">
@@ -10430,7 +10438,7 @@
                 </a:tc>
                 <a:tc>
                   <a:txBody>
-                    <a:bodyPr wrap="square" lIns="76200" rIns="76200" tIns="38100" bIns="38100"/>
+                    <a:bodyPr/>
                     <a:lstStyle/>
                     <a:p>
                       <a:pPr algn="l">
@@ -10477,7 +10485,7 @@
                 </a:tc>
                 <a:tc>
                   <a:txBody>
-                    <a:bodyPr wrap="square" lIns="76200" rIns="76200" tIns="38100" bIns="38100"/>
+                    <a:bodyPr/>
                     <a:lstStyle/>
                     <a:p>
                       <a:pPr algn="l">
@@ -10524,7 +10532,7 @@
                 </a:tc>
                 <a:tc>
                   <a:txBody>
-                    <a:bodyPr wrap="square" lIns="76200" rIns="76200" tIns="38100" bIns="38100"/>
+                    <a:bodyPr/>
                     <a:lstStyle/>
                     <a:p>
                       <a:pPr algn="l">
@@ -10578,7 +10586,7 @@
               <a:tr h="428625">
                 <a:tc>
                   <a:txBody>
-                    <a:bodyPr wrap="square" lIns="76200" rIns="76200" tIns="38100" bIns="38100"/>
+                    <a:bodyPr/>
                     <a:lstStyle/>
                     <a:p>
                       <a:pPr algn="l">
@@ -10625,7 +10633,7 @@
                 </a:tc>
                 <a:tc>
                   <a:txBody>
-                    <a:bodyPr wrap="square" lIns="76200" rIns="76200" tIns="38100" bIns="38100"/>
+                    <a:bodyPr/>
                     <a:lstStyle/>
                     <a:p>
                       <a:pPr algn="l">
@@ -10672,7 +10680,7 @@
                 </a:tc>
                 <a:tc>
                   <a:txBody>
-                    <a:bodyPr wrap="square" lIns="76200" rIns="76200" tIns="38100" bIns="38100"/>
+                    <a:bodyPr/>
                     <a:lstStyle/>
                     <a:p>
                       <a:pPr algn="l">
@@ -10719,7 +10727,7 @@
                 </a:tc>
                 <a:tc>
                   <a:txBody>
-                    <a:bodyPr wrap="square" lIns="76200" rIns="76200" tIns="38100" bIns="38100"/>
+                    <a:bodyPr/>
                     <a:lstStyle/>
                     <a:p>
                       <a:pPr algn="l">
@@ -10766,7 +10774,7 @@
                 </a:tc>
                 <a:tc>
                   <a:txBody>
-                    <a:bodyPr wrap="square" lIns="76200" rIns="76200" tIns="38100" bIns="38100"/>
+                    <a:bodyPr/>
                     <a:lstStyle/>
                     <a:p>
                       <a:pPr algn="l">
@@ -10820,7 +10828,7 @@
               <a:tr h="428625">
                 <a:tc>
                   <a:txBody>
-                    <a:bodyPr wrap="square" lIns="76200" rIns="76200" tIns="38100" bIns="38100"/>
+                    <a:bodyPr/>
                     <a:lstStyle/>
                     <a:p>
                       <a:pPr algn="l">
@@ -10867,7 +10875,7 @@
                 </a:tc>
                 <a:tc>
                   <a:txBody>
-                    <a:bodyPr wrap="square" lIns="76200" rIns="76200" tIns="38100" bIns="38100"/>
+                    <a:bodyPr/>
                     <a:lstStyle/>
                     <a:p>
                       <a:pPr algn="l">
@@ -10914,7 +10922,7 @@
                 </a:tc>
                 <a:tc>
                   <a:txBody>
-                    <a:bodyPr wrap="square" lIns="76200" rIns="76200" tIns="38100" bIns="38100"/>
+                    <a:bodyPr/>
                     <a:lstStyle/>
                     <a:p>
                       <a:pPr algn="l">
@@ -10961,7 +10969,7 @@
                 </a:tc>
                 <a:tc>
                   <a:txBody>
-                    <a:bodyPr wrap="square" lIns="76200" rIns="76200" tIns="38100" bIns="38100"/>
+                    <a:bodyPr/>
                     <a:lstStyle/>
                     <a:p>
                       <a:pPr algn="l">
@@ -11008,7 +11016,7 @@
                 </a:tc>
                 <a:tc>
                   <a:txBody>
-                    <a:bodyPr wrap="square" lIns="76200" rIns="76200" tIns="38100" bIns="38100"/>
+                    <a:bodyPr/>
                     <a:lstStyle/>
                     <a:p>
                       <a:pPr algn="l">
@@ -11062,7 +11070,7 @@
               <a:tr h="428625">
                 <a:tc>
                   <a:txBody>
-                    <a:bodyPr wrap="square" lIns="76200" rIns="76200" tIns="38100" bIns="38100"/>
+                    <a:bodyPr/>
                     <a:lstStyle/>
                     <a:p>
                       <a:pPr algn="l">
@@ -11109,7 +11117,7 @@
                 </a:tc>
                 <a:tc>
                   <a:txBody>
-                    <a:bodyPr wrap="square" lIns="76200" rIns="76200" tIns="38100" bIns="38100"/>
+                    <a:bodyPr/>
                     <a:lstStyle/>
                     <a:p>
                       <a:pPr algn="l">
@@ -11156,7 +11164,7 @@
                 </a:tc>
                 <a:tc>
                   <a:txBody>
-                    <a:bodyPr wrap="square" lIns="76200" rIns="76200" tIns="38100" bIns="38100"/>
+                    <a:bodyPr/>
                     <a:lstStyle/>
                     <a:p>
                       <a:pPr algn="l">
@@ -11203,7 +11211,7 @@
                 </a:tc>
                 <a:tc>
                   <a:txBody>
-                    <a:bodyPr wrap="square" lIns="76200" rIns="76200" tIns="38100" bIns="38100"/>
+                    <a:bodyPr/>
                     <a:lstStyle/>
                     <a:p>
                       <a:pPr algn="l">
@@ -11250,7 +11258,7 @@
                 </a:tc>
                 <a:tc>
                   <a:txBody>
-                    <a:bodyPr wrap="square" lIns="76200" rIns="76200" tIns="38100" bIns="38100"/>
+                    <a:bodyPr/>
                     <a:lstStyle/>
                     <a:p>
                       <a:pPr algn="l">
@@ -11304,7 +11312,7 @@
               <a:tr h="428625">
                 <a:tc>
                   <a:txBody>
-                    <a:bodyPr wrap="square" lIns="76200" rIns="76200" tIns="38100" bIns="38100"/>
+                    <a:bodyPr/>
                     <a:lstStyle/>
                     <a:p>
                       <a:pPr algn="l">
@@ -11351,7 +11359,7 @@
                 </a:tc>
                 <a:tc>
                   <a:txBody>
-                    <a:bodyPr wrap="square" lIns="76200" rIns="76200" tIns="38100" bIns="38100"/>
+                    <a:bodyPr/>
                     <a:lstStyle/>
                     <a:p>
                       <a:pPr algn="l">
@@ -11398,7 +11406,7 @@
                 </a:tc>
                 <a:tc>
                   <a:txBody>
-                    <a:bodyPr wrap="square" lIns="76200" rIns="76200" tIns="38100" bIns="38100"/>
+                    <a:bodyPr/>
                     <a:lstStyle/>
                     <a:p>
                       <a:pPr algn="l">
@@ -11445,7 +11453,7 @@
                 </a:tc>
                 <a:tc>
                   <a:txBody>
-                    <a:bodyPr wrap="square" lIns="76200" rIns="76200" tIns="38100" bIns="38100"/>
+                    <a:bodyPr/>
                     <a:lstStyle/>
                     <a:p>
                       <a:pPr algn="l">
@@ -11492,7 +11500,7 @@
                 </a:tc>
                 <a:tc>
                   <a:txBody>
-                    <a:bodyPr wrap="square" lIns="76200" rIns="76200" tIns="38100" bIns="38100"/>
+                    <a:bodyPr/>
                     <a:lstStyle/>
                     <a:p>
                       <a:pPr algn="l">
@@ -11546,7 +11554,7 @@
               <a:tr h="428625">
                 <a:tc>
                   <a:txBody>
-                    <a:bodyPr wrap="square" lIns="76200" rIns="76200" tIns="38100" bIns="38100"/>
+                    <a:bodyPr/>
                     <a:lstStyle/>
                     <a:p>
                       <a:pPr algn="l">
@@ -11593,7 +11601,7 @@
                 </a:tc>
                 <a:tc>
                   <a:txBody>
-                    <a:bodyPr wrap="square" lIns="76200" rIns="76200" tIns="38100" bIns="38100"/>
+                    <a:bodyPr/>
                     <a:lstStyle/>
                     <a:p>
                       <a:pPr algn="l">
@@ -11640,7 +11648,7 @@
                 </a:tc>
                 <a:tc>
                   <a:txBody>
-                    <a:bodyPr wrap="square" lIns="76200" rIns="76200" tIns="38100" bIns="38100"/>
+                    <a:bodyPr/>
                     <a:lstStyle/>
                     <a:p>
                       <a:pPr algn="l">
@@ -11687,7 +11695,7 @@
                 </a:tc>
                 <a:tc>
                   <a:txBody>
-                    <a:bodyPr wrap="square" lIns="76200" rIns="76200" tIns="38100" bIns="38100"/>
+                    <a:bodyPr/>
                     <a:lstStyle/>
                     <a:p>
                       <a:pPr algn="l">
@@ -11734,7 +11742,7 @@
                 </a:tc>
                 <a:tc>
                   <a:txBody>
-                    <a:bodyPr wrap="square" lIns="76200" rIns="76200" tIns="38100" bIns="38100"/>
+                    <a:bodyPr/>
                     <a:lstStyle/>
                     <a:p>
                       <a:pPr algn="l">
@@ -11788,7 +11796,7 @@
               <a:tr h="428625">
                 <a:tc>
                   <a:txBody>
-                    <a:bodyPr wrap="square" lIns="76200" rIns="76200" tIns="38100" bIns="38100"/>
+                    <a:bodyPr/>
                     <a:lstStyle/>
                     <a:p>
                       <a:pPr algn="l">
@@ -11835,7 +11843,7 @@
                 </a:tc>
                 <a:tc>
                   <a:txBody>
-                    <a:bodyPr wrap="square" lIns="76200" rIns="76200" tIns="38100" bIns="38100"/>
+                    <a:bodyPr/>
                     <a:lstStyle/>
                     <a:p>
                       <a:pPr algn="l">
@@ -11882,7 +11890,7 @@
                 </a:tc>
                 <a:tc>
                   <a:txBody>
-                    <a:bodyPr wrap="square" lIns="76200" rIns="76200" tIns="38100" bIns="38100"/>
+                    <a:bodyPr/>
                     <a:lstStyle/>
                     <a:p>
                       <a:pPr algn="l">
@@ -11929,7 +11937,7 @@
                 </a:tc>
                 <a:tc>
                   <a:txBody>
-                    <a:bodyPr wrap="square" lIns="76200" rIns="76200" tIns="38100" bIns="38100"/>
+                    <a:bodyPr/>
                     <a:lstStyle/>
                     <a:p>
                       <a:pPr algn="l">
@@ -11976,7 +11984,7 @@
                 </a:tc>
                 <a:tc>
                   <a:txBody>
-                    <a:bodyPr wrap="square" lIns="76200" rIns="76200" tIns="38100" bIns="38100"/>
+                    <a:bodyPr/>
                     <a:lstStyle/>
                     <a:p>
                       <a:pPr algn="l">
@@ -12030,7 +12038,7 @@
               <a:tr h="428625">
                 <a:tc>
                   <a:txBody>
-                    <a:bodyPr wrap="square" lIns="76200" rIns="76200" tIns="38100" bIns="38100"/>
+                    <a:bodyPr/>
                     <a:lstStyle/>
                     <a:p>
                       <a:pPr algn="l">
@@ -12077,7 +12085,7 @@
                 </a:tc>
                 <a:tc>
                   <a:txBody>
-                    <a:bodyPr wrap="square" lIns="76200" rIns="76200" tIns="38100" bIns="38100"/>
+                    <a:bodyPr/>
                     <a:lstStyle/>
                     <a:p>
                       <a:pPr algn="l">
@@ -12124,7 +12132,7 @@
                 </a:tc>
                 <a:tc>
                   <a:txBody>
-                    <a:bodyPr wrap="square" lIns="76200" rIns="76200" tIns="38100" bIns="38100"/>
+                    <a:bodyPr/>
                     <a:lstStyle/>
                     <a:p>
                       <a:pPr algn="l">
@@ -12171,7 +12179,7 @@
                 </a:tc>
                 <a:tc>
                   <a:txBody>
-                    <a:bodyPr wrap="square" lIns="76200" rIns="76200" tIns="38100" bIns="38100"/>
+                    <a:bodyPr/>
                     <a:lstStyle/>
                     <a:p>
                       <a:pPr algn="l">
@@ -12218,7 +12226,7 @@
                 </a:tc>
                 <a:tc>
                   <a:txBody>
-                    <a:bodyPr wrap="square" lIns="76200" rIns="76200" tIns="38100" bIns="38100"/>
+                    <a:bodyPr/>
                     <a:lstStyle/>
                     <a:p>
                       <a:pPr algn="l">
@@ -12272,7 +12280,7 @@
               <a:tr h="428625">
                 <a:tc>
                   <a:txBody>
-                    <a:bodyPr wrap="square" lIns="76200" rIns="76200" tIns="38100" bIns="38100"/>
+                    <a:bodyPr/>
                     <a:lstStyle/>
                     <a:p>
                       <a:pPr algn="l">
@@ -12319,7 +12327,7 @@
                 </a:tc>
                 <a:tc>
                   <a:txBody>
-                    <a:bodyPr wrap="square" lIns="76200" rIns="76200" tIns="38100" bIns="38100"/>
+                    <a:bodyPr/>
                     <a:lstStyle/>
                     <a:p>
                       <a:pPr algn="l">
@@ -12366,7 +12374,7 @@
                 </a:tc>
                 <a:tc>
                   <a:txBody>
-                    <a:bodyPr wrap="square" lIns="76200" rIns="76200" tIns="38100" bIns="38100"/>
+                    <a:bodyPr/>
                     <a:lstStyle/>
                     <a:p>
                       <a:pPr algn="l">
@@ -12413,7 +12421,7 @@
                 </a:tc>
                 <a:tc>
                   <a:txBody>
-                    <a:bodyPr wrap="square" lIns="76200" rIns="76200" tIns="38100" bIns="38100"/>
+                    <a:bodyPr/>
                     <a:lstStyle/>
                     <a:p>
                       <a:pPr algn="l">
@@ -12460,7 +12468,7 @@
                 </a:tc>
                 <a:tc>
                   <a:txBody>
-                    <a:bodyPr wrap="square" lIns="76200" rIns="76200" tIns="38100" bIns="38100"/>
+                    <a:bodyPr/>
                     <a:lstStyle/>
                     <a:p>
                       <a:pPr algn="l">
@@ -12632,9 +12640,9 @@
               </a:defRPr>
             </a:pPr>
             <a:r>
-              <a:rPr sz="3600" b="0">
+              <a:rPr sz="3600" b="1" lang="en-US">
                 <a:solidFill>
-                  <a:srgbClr val="4FB3FF"/>
+                  <a:srgbClr val="37AFFF"/>
                 </a:solidFill>
                 <a:latin typeface="Arial"/>
                 <a:ea typeface="Arial"/>
@@ -12686,7 +12694,7 @@
           <a:lstStyle/>
           <a:p>
             <a:r>
-              <a:rPr sz="3600" b="0">
+              <a:rPr sz="3600" b="1" lang="en-US">
                 <a:solidFill>
                   <a:srgbClr val="F3F4F6"/>
                 </a:solidFill>
@@ -12713,7 +12721,7 @@
         </p:nvSpPr>
         <p:spPr>
           <a:xfrm>
-            <a:off x="457200" y="1162050"/>
+            <a:off x="457200" y="1160000"/>
             <a:ext cx="11277600" cy="0"/>
           </a:xfrm>
           <a:prstGeom prst="rect">
@@ -12722,7 +12730,7 @@
           <a:solidFill>
             <a:srgbClr val="3A3A3A"/>
           </a:solidFill>
-          <a:ln w="0">
+          <a:ln w="9525">
             <a:solidFill>
               <a:srgbClr val="3A3A3A"/>
             </a:solidFill>
@@ -12762,7 +12770,7 @@
           <a:solidFill>
             <a:srgbClr val="3A3A3A"/>
           </a:solidFill>
-          <a:ln w="0">
+          <a:ln w="9525">
             <a:solidFill>
               <a:srgbClr val="3A3A3A"/>
             </a:solidFill>
@@ -12845,7 +12853,7 @@
         </p:nvSpPr>
         <p:spPr>
           <a:xfrm>
-            <a:off x="11144250" y="6286500"/>
+            <a:off x="11146536" y="6291072"/>
             <a:ext cx="590550" cy="228600"/>
           </a:xfrm>
           <a:prstGeom prst="rect">
@@ -12880,7 +12888,7 @@
               </a:defRPr>
             </a:pPr>
             <a:r>
-              <a:rPr sz="900" b="0">
+              <a:rPr sz="900" b="0" lang="en-US">
                 <a:solidFill>
                   <a:srgbClr val="A5A5A5"/>
                 </a:solidFill>
@@ -12888,7 +12896,7 @@
                 <a:ea typeface="Arial"/>
                 <a:cs typeface="Arial"/>
               </a:rPr>
-              <a:t>14 / 21</a:t>
+              <a:t>09 / 12</a:t>
             </a:r>
           </a:p>
         </p:txBody>
